--- a/reports/report1/slides/DSP391m_Report1_Proposal.pptx
+++ b/reports/report1/slides/DSP391m_Report1_Proposal.pptx
@@ -2190,7 +2190,7 @@
                 <a:ea typeface="Calibri" pitchFamily="34" charset="-122"/>
                 <a:cs typeface="Calibri" pitchFamily="34" charset="-120"/>
               </a:rPr>
-              <a:t>Dang Nguyen Giap  ·  Hoang Anh Duc  ·  Le Thi Huyen</a:t>
+              <a:t>Dang Nguyen Giap  ·  Hoang Anh Duc  ·  Mai Thi Le Huyen</a:t>
             </a:r>
             <a:endParaRPr lang="en-US" sz="1100" dirty="0"/>
           </a:p>
